--- a/dataset/guides_final/SYS/guide/IT-SYS-002_사내 시스템 성능 저하 대응 가이드.pptx
+++ b/dataset/guides_final/SYS/guide/IT-SYS-002_사내 시스템 성능 저하 대응 가이드.pptx
@@ -3264,7 +3264,7 @@
                 <a:ea typeface="Malgun Gothic"/>
                 <a:cs typeface="Malgun Gothic"/>
               </a:rPr>
-              <a:t>한화시스템 ICT 임직원 IT 안내 · 사내 시스템</a:t>
+              <a:t>가상 ICT 기업 임직원 IT 안내 · 사내 시스템</a:t>
             </a:r>
           </a:p>
         </p:txBody>
@@ -3496,7 +3496,7 @@
                 <a:ea typeface="Malgun Gothic"/>
                 <a:cs typeface="Malgun Gothic"/>
               </a:rPr>
-              <a:t>© HANWHA SYSTEMS ICT · IT-SYS-002 · 사내 일반</a:t>
+              <a:t>© 가상 ICT 기업 · IT-SYS-002 · 사내 일반</a:t>
             </a:r>
           </a:p>
         </p:txBody>
@@ -4319,7 +4319,7 @@
                 <a:ea typeface="Malgun Gothic"/>
                 <a:cs typeface="Malgun Gothic"/>
               </a:rPr>
-              <a:t>© HANWHA SYSTEMS ICT · IT-SYS-002 · 사내 일반</a:t>
+              <a:t>© 가상 ICT 기업 · IT-SYS-002 · 사내 일반</a:t>
             </a:r>
           </a:p>
         </p:txBody>
@@ -6088,7 +6088,7 @@
                 <a:ea typeface="Malgun Gothic"/>
                 <a:cs typeface="Malgun Gothic"/>
               </a:rPr>
-              <a:t>© HANWHA SYSTEMS ICT · IT-SYS-002 · 사내 일반</a:t>
+              <a:t>© 가상 ICT 기업 · IT-SYS-002 · 사내 일반</a:t>
             </a:r>
           </a:p>
         </p:txBody>
@@ -7992,7 +7992,7 @@
                 <a:ea typeface="Malgun Gothic"/>
                 <a:cs typeface="Malgun Gothic"/>
               </a:rPr>
-              <a:t>© HANWHA SYSTEMS ICT · IT-SYS-002 · 사내 일반</a:t>
+              <a:t>© 가상 ICT 기업 · IT-SYS-002 · 사내 일반</a:t>
             </a:r>
           </a:p>
         </p:txBody>
@@ -8649,7 +8649,7 @@
                 <a:ea typeface="Malgun Gothic"/>
                 <a:cs typeface="Malgun Gothic"/>
               </a:rPr>
-              <a:t>© HANWHA SYSTEMS ICT · IT-SYS-002 · 사내 일반</a:t>
+              <a:t>© 가상 ICT 기업 · IT-SYS-002 · 사내 일반</a:t>
             </a:r>
           </a:p>
         </p:txBody>
@@ -9306,7 +9306,7 @@
                 <a:ea typeface="Malgun Gothic"/>
                 <a:cs typeface="Malgun Gothic"/>
               </a:rPr>
-              <a:t>© HANWHA SYSTEMS ICT · IT-SYS-002 · 사내 일반</a:t>
+              <a:t>© 가상 ICT 기업 · IT-SYS-002 · 사내 일반</a:t>
             </a:r>
           </a:p>
         </p:txBody>
@@ -11898,7 +11898,7 @@
                 <a:ea typeface="Malgun Gothic"/>
                 <a:cs typeface="Malgun Gothic"/>
               </a:rPr>
-              <a:t>© HANWHA SYSTEMS ICT · IT-SYS-002 · 사내 일반</a:t>
+              <a:t>© 가상 ICT 기업 · IT-SYS-002 · 사내 일반</a:t>
             </a:r>
           </a:p>
         </p:txBody>
@@ -12484,7 +12484,7 @@
                 <a:ea typeface="Malgun Gothic"/>
                 <a:cs typeface="Malgun Gothic"/>
               </a:rPr>
-              <a:t>© HANWHA SYSTEMS ICT · IT-SYS-002 · 사내 일반</a:t>
+              <a:t>© 가상 ICT 기업 · IT-SYS-002 · 사내 일반</a:t>
             </a:r>
           </a:p>
         </p:txBody>
@@ -13047,7 +13047,7 @@
                 <a:ea typeface="Malgun Gothic"/>
                 <a:cs typeface="Malgun Gothic"/>
               </a:rPr>
-              <a:t>© HANWHA SYSTEMS ICT · IT-SYS-002 · 사내 일반</a:t>
+              <a:t>© 가상 ICT 기업 · IT-SYS-002 · 사내 일반</a:t>
             </a:r>
           </a:p>
         </p:txBody>
@@ -13728,7 +13728,7 @@
                 <a:ea typeface="Malgun Gothic"/>
                 <a:cs typeface="Malgun Gothic"/>
               </a:rPr>
-              <a:t>© HANWHA SYSTEMS ICT · IT-SYS-002 · 사내 일반</a:t>
+              <a:t>© 가상 ICT 기업 · IT-SYS-002 · 사내 일반</a:t>
             </a:r>
           </a:p>
         </p:txBody>
@@ -16202,7 +16202,7 @@
                 <a:ea typeface="Malgun Gothic"/>
                 <a:cs typeface="Malgun Gothic"/>
               </a:rPr>
-              <a:t>© HANWHA SYSTEMS ICT · IT-SYS-002 · 사내 일반</a:t>
+              <a:t>© 가상 ICT 기업 · IT-SYS-002 · 사내 일반</a:t>
             </a:r>
           </a:p>
         </p:txBody>
@@ -18031,7 +18031,7 @@
                 <a:ea typeface="Malgun Gothic"/>
                 <a:cs typeface="Malgun Gothic"/>
               </a:rPr>
-              <a:t>© HANWHA SYSTEMS ICT · IT-SYS-002 · 사내 일반</a:t>
+              <a:t>© 가상 ICT 기업 · IT-SYS-002 · 사내 일반</a:t>
             </a:r>
           </a:p>
         </p:txBody>
@@ -18641,7 +18641,7 @@
                 <a:ea typeface="Malgun Gothic"/>
                 <a:cs typeface="Malgun Gothic"/>
               </a:rPr>
-              <a:t>© HANWHA SYSTEMS ICT · IT-SYS-002 · 사내 일반</a:t>
+              <a:t>© 가상 ICT 기업 · IT-SYS-002 · 사내 일반</a:t>
             </a:r>
           </a:p>
         </p:txBody>
@@ -19346,7 +19346,7 @@
                 <a:ea typeface="Malgun Gothic"/>
                 <a:cs typeface="Malgun Gothic"/>
               </a:rPr>
-              <a:t>© HANWHA SYSTEMS ICT · IT-SYS-002 · 사내 일반</a:t>
+              <a:t>© 가상 ICT 기업 · IT-SYS-002 · 사내 일반</a:t>
             </a:r>
           </a:p>
         </p:txBody>
@@ -21938,7 +21938,7 @@
                 <a:ea typeface="Malgun Gothic"/>
                 <a:cs typeface="Malgun Gothic"/>
               </a:rPr>
-              <a:t>© HANWHA SYSTEMS ICT · IT-SYS-002 · 사내 일반</a:t>
+              <a:t>© 가상 ICT 기업 · IT-SYS-002 · 사내 일반</a:t>
             </a:r>
           </a:p>
         </p:txBody>
@@ -22524,7 +22524,7 @@
                 <a:ea typeface="Malgun Gothic"/>
                 <a:cs typeface="Malgun Gothic"/>
               </a:rPr>
-              <a:t>© HANWHA SYSTEMS ICT · IT-SYS-002 · 사내 일반</a:t>
+              <a:t>© 가상 ICT 기업 · IT-SYS-002 · 사내 일반</a:t>
             </a:r>
           </a:p>
         </p:txBody>
@@ -23063,7 +23063,7 @@
                 <a:ea typeface="Malgun Gothic"/>
                 <a:cs typeface="Malgun Gothic"/>
               </a:rPr>
-              <a:t>© HANWHA SYSTEMS ICT · IT-SYS-002 · 사내 일반</a:t>
+              <a:t>© 가상 ICT 기업 · IT-SYS-002 · 사내 일반</a:t>
             </a:r>
           </a:p>
         </p:txBody>
@@ -23744,7 +23744,7 @@
                 <a:ea typeface="Malgun Gothic"/>
                 <a:cs typeface="Malgun Gothic"/>
               </a:rPr>
-              <a:t>© HANWHA SYSTEMS ICT · IT-SYS-002 · 사내 일반</a:t>
+              <a:t>© 가상 ICT 기업 · IT-SYS-002 · 사내 일반</a:t>
             </a:r>
           </a:p>
         </p:txBody>
@@ -26218,7 +26218,7 @@
                 <a:ea typeface="Malgun Gothic"/>
                 <a:cs typeface="Malgun Gothic"/>
               </a:rPr>
-              <a:t>© HANWHA SYSTEMS ICT · IT-SYS-002 · 사내 일반</a:t>
+              <a:t>© 가상 ICT 기업 · IT-SYS-002 · 사내 일반</a:t>
             </a:r>
           </a:p>
         </p:txBody>
@@ -26804,7 +26804,7 @@
                 <a:ea typeface="Malgun Gothic"/>
                 <a:cs typeface="Malgun Gothic"/>
               </a:rPr>
-              <a:t>© HANWHA SYSTEMS ICT · IT-SYS-002 · 사내 일반</a:t>
+              <a:t>© 가상 ICT 기업 · IT-SYS-002 · 사내 일반</a:t>
             </a:r>
           </a:p>
         </p:txBody>
@@ -27438,7 +27438,7 @@
                 <a:ea typeface="Malgun Gothic"/>
                 <a:cs typeface="Malgun Gothic"/>
               </a:rPr>
-              <a:t>© HANWHA SYSTEMS ICT · IT-SYS-002 · 사내 일반</a:t>
+              <a:t>© 가상 ICT 기업 · IT-SYS-002 · 사내 일반</a:t>
             </a:r>
           </a:p>
         </p:txBody>
@@ -28143,7 +28143,7 @@
                 <a:ea typeface="Malgun Gothic"/>
                 <a:cs typeface="Malgun Gothic"/>
               </a:rPr>
-              <a:t>© HANWHA SYSTEMS ICT · IT-SYS-002 · 사내 일반</a:t>
+              <a:t>© 가상 ICT 기업 · IT-SYS-002 · 사내 일반</a:t>
             </a:r>
           </a:p>
         </p:txBody>
@@ -29419,7 +29419,7 @@
                 <a:ea typeface="Malgun Gothic"/>
                 <a:cs typeface="Malgun Gothic"/>
               </a:rPr>
-              <a:t>© HANWHA SYSTEMS ICT · IT-SYS-002 · 사내 일반</a:t>
+              <a:t>© 가상 ICT 기업 · IT-SYS-002 · 사내 일반</a:t>
             </a:r>
           </a:p>
         </p:txBody>
@@ -31893,7 +31893,7 @@
                 <a:ea typeface="Malgun Gothic"/>
                 <a:cs typeface="Malgun Gothic"/>
               </a:rPr>
-              <a:t>© HANWHA SYSTEMS ICT · IT-SYS-002 · 사내 일반</a:t>
+              <a:t>© 가상 ICT 기업 · IT-SYS-002 · 사내 일반</a:t>
             </a:r>
           </a:p>
         </p:txBody>
@@ -32432,7 +32432,7 @@
                 <a:ea typeface="Malgun Gothic"/>
                 <a:cs typeface="Malgun Gothic"/>
               </a:rPr>
-              <a:t>© HANWHA SYSTEMS ICT · IT-SYS-002 · 사내 일반</a:t>
+              <a:t>© 가상 ICT 기업 · IT-SYS-002 · 사내 일반</a:t>
             </a:r>
           </a:p>
         </p:txBody>
@@ -32995,7 +32995,7 @@
                 <a:ea typeface="Malgun Gothic"/>
                 <a:cs typeface="Malgun Gothic"/>
               </a:rPr>
-              <a:t>© HANWHA SYSTEMS ICT · IT-SYS-002 · 사내 일반</a:t>
+              <a:t>© 가상 ICT 기업 · IT-SYS-002 · 사내 일반</a:t>
             </a:r>
           </a:p>
         </p:txBody>
@@ -33771,7 +33771,7 @@
                 <a:ea typeface="Malgun Gothic"/>
                 <a:cs typeface="Malgun Gothic"/>
               </a:rPr>
-              <a:t>© HANWHA SYSTEMS ICT · IT-SYS-002 · 사내 일반</a:t>
+              <a:t>© 가상 ICT 기업 · IT-SYS-002 · 사내 일반</a:t>
             </a:r>
           </a:p>
         </p:txBody>
@@ -36339,7 +36339,7 @@
                 <a:ea typeface="Malgun Gothic"/>
                 <a:cs typeface="Malgun Gothic"/>
               </a:rPr>
-              <a:t>© HANWHA SYSTEMS ICT · IT-SYS-002 · 사내 일반</a:t>
+              <a:t>© 가상 ICT 기업 · IT-SYS-002 · 사내 일반</a:t>
             </a:r>
           </a:p>
         </p:txBody>
@@ -36902,7 +36902,7 @@
                 <a:ea typeface="Malgun Gothic"/>
                 <a:cs typeface="Malgun Gothic"/>
               </a:rPr>
-              <a:t>© HANWHA SYSTEMS ICT · IT-SYS-002 · 사내 일반</a:t>
+              <a:t>© 가상 ICT 기업 · IT-SYS-002 · 사내 일반</a:t>
             </a:r>
           </a:p>
         </p:txBody>
@@ -37442,7 +37442,7 @@
                 <a:ea typeface="Malgun Gothic"/>
                 <a:cs typeface="Malgun Gothic"/>
               </a:rPr>
-              <a:t>© HANWHA SYSTEMS ICT · IT-SYS-002 · 사내 일반</a:t>
+              <a:t>© 가상 ICT 기업 · IT-SYS-002 · 사내 일반</a:t>
             </a:r>
           </a:p>
         </p:txBody>
@@ -38076,7 +38076,7 @@
                 <a:ea typeface="Malgun Gothic"/>
                 <a:cs typeface="Malgun Gothic"/>
               </a:rPr>
-              <a:t>© HANWHA SYSTEMS ICT · IT-SYS-002 · 사내 일반</a:t>
+              <a:t>© 가상 ICT 기업 · IT-SYS-002 · 사내 일반</a:t>
             </a:r>
           </a:p>
         </p:txBody>
@@ -38852,7 +38852,7 @@
                 <a:ea typeface="Malgun Gothic"/>
                 <a:cs typeface="Malgun Gothic"/>
               </a:rPr>
-              <a:t>© HANWHA SYSTEMS ICT · IT-SYS-002 · 사내 일반</a:t>
+              <a:t>© 가상 ICT 기업 · IT-SYS-002 · 사내 일반</a:t>
             </a:r>
           </a:p>
         </p:txBody>
@@ -41326,7 +41326,7 @@
                 <a:ea typeface="Malgun Gothic"/>
                 <a:cs typeface="Malgun Gothic"/>
               </a:rPr>
-              <a:t>© HANWHA SYSTEMS ICT · IT-SYS-002 · 사내 일반</a:t>
+              <a:t>© 가상 ICT 기업 · IT-SYS-002 · 사내 일반</a:t>
             </a:r>
           </a:p>
         </p:txBody>
@@ -41574,7 +41574,7 @@
                 <a:ea typeface="Malgun Gothic"/>
                 <a:cs typeface="Malgun Gothic"/>
               </a:rPr>
-              <a:t>© HANWHA SYSTEMS ICT · IT-SYS-002 · 사내 일반</a:t>
+              <a:t>© 가상 ICT 기업 · IT-SYS-002 · 사내 일반</a:t>
             </a:r>
           </a:p>
         </p:txBody>
@@ -42137,7 +42137,7 @@
                 <a:ea typeface="Malgun Gothic"/>
                 <a:cs typeface="Malgun Gothic"/>
               </a:rPr>
-              <a:t>© HANWHA SYSTEMS ICT · IT-SYS-002 · 사내 일반</a:t>
+              <a:t>© 가상 ICT 기업 · IT-SYS-002 · 사내 일반</a:t>
             </a:r>
           </a:p>
         </p:txBody>
@@ -42676,7 +42676,7 @@
                 <a:ea typeface="Malgun Gothic"/>
                 <a:cs typeface="Malgun Gothic"/>
               </a:rPr>
-              <a:t>© HANWHA SYSTEMS ICT · IT-SYS-002 · 사내 일반</a:t>
+              <a:t>© 가상 ICT 기업 · IT-SYS-002 · 사내 일반</a:t>
             </a:r>
           </a:p>
         </p:txBody>
@@ -43452,7 +43452,7 @@
                 <a:ea typeface="Malgun Gothic"/>
                 <a:cs typeface="Malgun Gothic"/>
               </a:rPr>
-              <a:t>© HANWHA SYSTEMS ICT · IT-SYS-002 · 사내 일반</a:t>
+              <a:t>© 가상 ICT 기업 · IT-SYS-002 · 사내 일반</a:t>
             </a:r>
           </a:p>
         </p:txBody>
@@ -43700,7 +43700,7 @@
                 <a:ea typeface="Malgun Gothic"/>
                 <a:cs typeface="Malgun Gothic"/>
               </a:rPr>
-              <a:t>© HANWHA SYSTEMS ICT · IT-SYS-002 · 사내 일반</a:t>
+              <a:t>© 가상 ICT 기업 · IT-SYS-002 · 사내 일반</a:t>
             </a:r>
           </a:p>
         </p:txBody>
@@ -44505,7 +44505,7 @@
                 <a:ea typeface="Malgun Gothic"/>
                 <a:cs typeface="Malgun Gothic"/>
               </a:rPr>
-              <a:t>© HANWHA SYSTEMS ICT · IT-SYS-002 · 사내 일반</a:t>
+              <a:t>© 가상 ICT 기업 · IT-SYS-002 · 사내 일반</a:t>
             </a:r>
           </a:p>
         </p:txBody>
@@ -44753,7 +44753,7 @@
                 <a:ea typeface="Malgun Gothic"/>
                 <a:cs typeface="Malgun Gothic"/>
               </a:rPr>
-              <a:t>© HANWHA SYSTEMS ICT · IT-SYS-002 · 사내 일반</a:t>
+              <a:t>© 가상 ICT 기업 · IT-SYS-002 · 사내 일반</a:t>
             </a:r>
           </a:p>
         </p:txBody>
@@ -45318,7 +45318,7 @@
                 <a:ea typeface="Malgun Gothic"/>
                 <a:cs typeface="Malgun Gothic"/>
               </a:rPr>
-              <a:t>© HANWHA SYSTEMS ICT · IT-SYS-002 · 사내 일반</a:t>
+              <a:t>© 가상 ICT 기업 · IT-SYS-002 · 사내 일반</a:t>
             </a:r>
           </a:p>
         </p:txBody>
@@ -45566,7 +45566,7 @@
                 <a:ea typeface="Malgun Gothic"/>
                 <a:cs typeface="Malgun Gothic"/>
               </a:rPr>
-              <a:t>© HANWHA SYSTEMS ICT · IT-SYS-002 · 사내 일반</a:t>
+              <a:t>© 가상 ICT 기업 · IT-SYS-002 · 사내 일반</a:t>
             </a:r>
           </a:p>
         </p:txBody>
@@ -46078,7 +46078,7 @@
                           <a:ea typeface="Malgun Gothic"/>
                           <a:cs typeface="Malgun Gothic"/>
                         </a:rPr>
-                        <a:t>사내 IT 포털(hanwha-admin) 상단 [챗봇 문의]</a:t>
+                        <a:t>사내 IT 포털 상단 [챗봇 문의]</a:t>
                       </a:r>
                     </a:p>
                   </a:txBody>
@@ -46770,7 +46770,7 @@
                           <a:ea typeface="Malgun Gothic"/>
                           <a:cs typeface="Malgun Gothic"/>
                         </a:rPr>
-                        <a:t>it-helpdesk@hanwha-ict.example</a:t>
+                        <a:t>it-helpdesk@ict.example</a:t>
                       </a:r>
                     </a:p>
                   </a:txBody>
@@ -47069,7 +47069,7 @@
                 <a:ea typeface="Malgun Gothic"/>
                 <a:cs typeface="Malgun Gothic"/>
               </a:rPr>
-              <a:t>© HANWHA SYSTEMS ICT · IT-SYS-002 · 사내 일반</a:t>
+              <a:t>© 가상 ICT 기업 · IT-SYS-002 · 사내 일반</a:t>
             </a:r>
           </a:p>
         </p:txBody>
@@ -47317,7 +47317,7 @@
                 <a:ea typeface="Malgun Gothic"/>
                 <a:cs typeface="Malgun Gothic"/>
               </a:rPr>
-              <a:t>© HANWHA SYSTEMS ICT · IT-SYS-002 · 사내 일반</a:t>
+              <a:t>© 가상 ICT 기업 · IT-SYS-002 · 사내 일반</a:t>
             </a:r>
           </a:p>
         </p:txBody>
@@ -48197,7 +48197,7 @@
                 <a:ea typeface="Malgun Gothic"/>
                 <a:cs typeface="Malgun Gothic"/>
               </a:rPr>
-              <a:t>© HANWHA SYSTEMS ICT · IT-SYS-002 · 사내 일반</a:t>
+              <a:t>© 가상 ICT 기업 · IT-SYS-002 · 사내 일반</a:t>
             </a:r>
           </a:p>
         </p:txBody>
@@ -50244,7 +50244,7 @@
                 <a:ea typeface="Malgun Gothic"/>
                 <a:cs typeface="Malgun Gothic"/>
               </a:rPr>
-              <a:t>© HANWHA SYSTEMS ICT · IT-SYS-002 · 사내 일반</a:t>
+              <a:t>© 가상 ICT 기업 · IT-SYS-002 · 사내 일반</a:t>
             </a:r>
           </a:p>
         </p:txBody>
@@ -51221,7 +51221,7 @@
                 <a:ea typeface="Malgun Gothic"/>
                 <a:cs typeface="Malgun Gothic"/>
               </a:rPr>
-              <a:t>© HANWHA SYSTEMS ICT · IT-SYS-002 · 사내 일반</a:t>
+              <a:t>© 가상 ICT 기업 · IT-SYS-002 · 사내 일반</a:t>
             </a:r>
           </a:p>
         </p:txBody>
@@ -51469,7 +51469,7 @@
                 <a:ea typeface="Malgun Gothic"/>
                 <a:cs typeface="Malgun Gothic"/>
               </a:rPr>
-              <a:t>© HANWHA SYSTEMS ICT · IT-SYS-002 · 사내 일반</a:t>
+              <a:t>© 가상 ICT 기업 · IT-SYS-002 · 사내 일반</a:t>
             </a:r>
           </a:p>
         </p:txBody>
@@ -52128,7 +52128,7 @@
                 <a:ea typeface="Malgun Gothic"/>
                 <a:cs typeface="Malgun Gothic"/>
               </a:rPr>
-              <a:t>© HANWHA SYSTEMS ICT · IT-SYS-002 · 사내 일반</a:t>
+              <a:t>© 가상 ICT 기업 · IT-SYS-002 · 사내 일반</a:t>
             </a:r>
           </a:p>
         </p:txBody>
@@ -52376,7 +52376,7 @@
                 <a:ea typeface="Malgun Gothic"/>
                 <a:cs typeface="Malgun Gothic"/>
               </a:rPr>
-              <a:t>© HANWHA SYSTEMS ICT · IT-SYS-002 · 사내 일반</a:t>
+              <a:t>© 가상 ICT 기업 · IT-SYS-002 · 사내 일반</a:t>
             </a:r>
           </a:p>
         </p:txBody>
@@ -55181,7 +55181,7 @@
                 <a:ea typeface="Malgun Gothic"/>
                 <a:cs typeface="Malgun Gothic"/>
               </a:rPr>
-              <a:t>© HANWHA SYSTEMS ICT · IT-SYS-002 · 사내 일반</a:t>
+              <a:t>© 가상 ICT 기업 · IT-SYS-002 · 사내 일반</a:t>
             </a:r>
           </a:p>
         </p:txBody>
